--- a/Intro_Slides.pptx
+++ b/Intro_Slides.pptx
@@ -234,7 +234,7 @@
           <a:p>
             <a:fld id="{B56F32FC-4BD9-442A-A8C6-51598C909FE3}" type="datetimeFigureOut">
               <a:rPr lang="en-US" smtClean="0"/>
-              <a:t>2/24/2026</a:t>
+              <a:t>3/1/2026</a:t>
             </a:fld>
             <a:endParaRPr lang="en-US"/>
           </a:p>
@@ -411,7 +411,7 @@
           <a:p>
             <a:fld id="{056371FA-A98D-41E8-93F4-09945841298A}" type="datetimeFigureOut">
               <a:rPr lang="en-US" smtClean="0"/>
-              <a:t>2/23/2026</a:t>
+              <a:t>3/1/2026</a:t>
             </a:fld>
             <a:endParaRPr lang="en-US"/>
           </a:p>
@@ -7552,13 +7552,6 @@
             <a:r>
               <a:rPr lang="en-AU" dirty="0"/>
               <a:t>Postdoctoral researcher here in mathematical biology.</a:t>
-            </a:r>
-          </a:p>
-          <a:p>
-            <a:pPr lvl="1"/>
-            <a:r>
-              <a:rPr lang="en-AU" dirty="0"/>
-              <a:t>Moved down for this position.</a:t>
             </a:r>
           </a:p>
           <a:p>
@@ -9837,6 +9830,15 @@
 </file>
 
 <file path=customXml/item1.xml><?xml version="1.0" encoding="utf-8"?>
+<p:properties xmlns:p="http://schemas.microsoft.com/office/2006/metadata/properties" xmlns:xsi="http://www.w3.org/2001/XMLSchema-instance" xmlns:pc="http://schemas.microsoft.com/office/infopath/2007/PartnerControls">
+  <documentManagement>
+    <MediaServiceKeyPoints xmlns="aa087ea4-8209-4aba-aa9e-e2f8c83fd1d1" xsi:nil="true"/>
+    <_activity xmlns="aa087ea4-8209-4aba-aa9e-e2f8c83fd1d1" xsi:nil="true"/>
+  </documentManagement>
+</p:properties>
+</file>
+
+<file path=customXml/item2.xml><?xml version="1.0" encoding="utf-8"?>
 <ct:contentTypeSchema xmlns:ct="http://schemas.microsoft.com/office/2006/metadata/contentType" xmlns:ma="http://schemas.microsoft.com/office/2006/metadata/properties/metaAttributes" ct:_="" ma:_="" ma:contentTypeName="Document" ma:contentTypeID="0x0101008309AF1C46FA3B40842AD180BE849363" ma:contentTypeVersion="19" ma:contentTypeDescription="Create a new document." ma:contentTypeScope="" ma:versionID="60ebf1a04bd01f9f2a6b27381a4255b7">
   <xsd:schema xmlns:xsd="http://www.w3.org/2001/XMLSchema" xmlns:xs="http://www.w3.org/2001/XMLSchema" xmlns:p="http://schemas.microsoft.com/office/2006/metadata/properties" xmlns:ns3="aa087ea4-8209-4aba-aa9e-e2f8c83fd1d1" xmlns:ns4="4a0313c6-14a1-4a29-8cc8-44fb9bd13c43" targetNamespace="http://schemas.microsoft.com/office/2006/metadata/properties" ma:root="true" ma:fieldsID="851615bec7dc60f1c7e92329d9f7496e" ns3:_="" ns4:_="">
     <xsd:import namespace="aa087ea4-8209-4aba-aa9e-e2f8c83fd1d1"/>
@@ -10095,15 +10097,6 @@
 </ct:contentTypeSchema>
 </file>
 
-<file path=customXml/item2.xml><?xml version="1.0" encoding="utf-8"?>
-<p:properties xmlns:p="http://schemas.microsoft.com/office/2006/metadata/properties" xmlns:xsi="http://www.w3.org/2001/XMLSchema-instance" xmlns:pc="http://schemas.microsoft.com/office/infopath/2007/PartnerControls">
-  <documentManagement>
-    <MediaServiceKeyPoints xmlns="aa087ea4-8209-4aba-aa9e-e2f8c83fd1d1" xsi:nil="true"/>
-    <_activity xmlns="aa087ea4-8209-4aba-aa9e-e2f8c83fd1d1" xsi:nil="true"/>
-  </documentManagement>
-</p:properties>
-</file>
-
 <file path=customXml/item3.xml><?xml version="1.0" encoding="utf-8"?>
 <?mso-contentType ?>
 <FormTemplates xmlns="http://schemas.microsoft.com/sharepoint/v3/contenttype/forms">
@@ -10114,6 +10107,23 @@
 </file>
 
 <file path=customXml/itemProps1.xml><?xml version="1.0" encoding="utf-8"?>
+<ds:datastoreItem xmlns:ds="http://schemas.openxmlformats.org/officeDocument/2006/customXml" ds:itemID="{49168DCE-134F-4610-A6AA-88CEBE8D71D2}">
+  <ds:schemaRefs>
+    <ds:schemaRef ds:uri="http://schemas.microsoft.com/office/2006/metadata/properties"/>
+    <ds:schemaRef ds:uri="http://schemas.microsoft.com/office/infopath/2007/PartnerControls"/>
+    <ds:schemaRef ds:uri="http://schemas.microsoft.com/office/2006/documentManagement/types"/>
+    <ds:schemaRef ds:uri="aa087ea4-8209-4aba-aa9e-e2f8c83fd1d1"/>
+    <ds:schemaRef ds:uri="http://purl.org/dc/elements/1.1/"/>
+    <ds:schemaRef ds:uri="4a0313c6-14a1-4a29-8cc8-44fb9bd13c43"/>
+    <ds:schemaRef ds:uri="http://purl.org/dc/dcmitype/"/>
+    <ds:schemaRef ds:uri="http://purl.org/dc/terms/"/>
+    <ds:schemaRef ds:uri="http://schemas.openxmlformats.org/package/2006/metadata/core-properties"/>
+    <ds:schemaRef ds:uri="http://www.w3.org/XML/1998/namespace"/>
+  </ds:schemaRefs>
+</ds:datastoreItem>
+</file>
+
+<file path=customXml/itemProps2.xml><?xml version="1.0" encoding="utf-8"?>
 <ds:datastoreItem xmlns:ds="http://schemas.openxmlformats.org/officeDocument/2006/customXml" ds:itemID="{845A9839-AB0A-4D0F-B74B-3933483AD1D3}">
   <ds:schemaRefs>
     <ds:schemaRef ds:uri="4a0313c6-14a1-4a29-8cc8-44fb9bd13c43"/>
@@ -10132,23 +10142,6 @@
 </ds:datastoreItem>
 </file>
 
-<file path=customXml/itemProps2.xml><?xml version="1.0" encoding="utf-8"?>
-<ds:datastoreItem xmlns:ds="http://schemas.openxmlformats.org/officeDocument/2006/customXml" ds:itemID="{49168DCE-134F-4610-A6AA-88CEBE8D71D2}">
-  <ds:schemaRefs>
-    <ds:schemaRef ds:uri="http://schemas.microsoft.com/office/2006/metadata/properties"/>
-    <ds:schemaRef ds:uri="http://schemas.microsoft.com/office/infopath/2007/PartnerControls"/>
-    <ds:schemaRef ds:uri="http://schemas.microsoft.com/office/2006/documentManagement/types"/>
-    <ds:schemaRef ds:uri="aa087ea4-8209-4aba-aa9e-e2f8c83fd1d1"/>
-    <ds:schemaRef ds:uri="http://purl.org/dc/elements/1.1/"/>
-    <ds:schemaRef ds:uri="4a0313c6-14a1-4a29-8cc8-44fb9bd13c43"/>
-    <ds:schemaRef ds:uri="http://purl.org/dc/dcmitype/"/>
-    <ds:schemaRef ds:uri="http://purl.org/dc/terms/"/>
-    <ds:schemaRef ds:uri="http://schemas.openxmlformats.org/package/2006/metadata/core-properties"/>
-    <ds:schemaRef ds:uri="http://www.w3.org/XML/1998/namespace"/>
-  </ds:schemaRefs>
-</ds:datastoreItem>
-</file>
-
 <file path=customXml/itemProps3.xml><?xml version="1.0" encoding="utf-8"?>
 <ds:datastoreItem xmlns:ds="http://schemas.openxmlformats.org/officeDocument/2006/customXml" ds:itemID="{CABF691C-888B-4061-8A6F-D5CE84A0254B}">
   <ds:schemaRefs>
